--- a/기획서/민원 번호 23 컨셉 기획서.pptx
+++ b/기획서/민원 번호 23 컨셉 기획서.pptx
@@ -234,7 +234,7 @@
           <a:p>
             <a:fld id="{F4641385-7587-4543-BAAD-2A1893F68E09}" type="datetimeFigureOut">
               <a:rPr lang="ko-KR" altLang="en-US" smtClean="0"/>
-              <a:t>2025-10-01</a:t>
+              <a:t>2025-10-09</a:t>
             </a:fld>
             <a:endParaRPr lang="ko-KR" altLang="en-US"/>
           </a:p>
@@ -655,7 +655,7 @@
                 </a:solidFill>
               </a:rPr>
               <a:pPr/>
-              <a:t>2025-10-01</a:t>
+              <a:t>2025-10-09</a:t>
             </a:fld>
             <a:endParaRPr lang="ko-KR" altLang="en-US" dirty="0">
               <a:solidFill>
@@ -885,7 +885,7 @@
                 </a:solidFill>
               </a:rPr>
               <a:pPr/>
-              <a:t>2025-10-01</a:t>
+              <a:t>2025-10-09</a:t>
             </a:fld>
             <a:endParaRPr lang="ko-KR" altLang="en-US" dirty="0">
               <a:solidFill>
@@ -1125,7 +1125,7 @@
                 </a:solidFill>
               </a:rPr>
               <a:pPr/>
-              <a:t>2025-10-01</a:t>
+              <a:t>2025-10-09</a:t>
             </a:fld>
             <a:endParaRPr lang="ko-KR" altLang="en-US" dirty="0">
               <a:solidFill>
@@ -1355,7 +1355,7 @@
                 </a:solidFill>
               </a:rPr>
               <a:pPr/>
-              <a:t>2025-10-01</a:t>
+              <a:t>2025-10-09</a:t>
             </a:fld>
             <a:endParaRPr lang="ko-KR" altLang="en-US" dirty="0">
               <a:solidFill>
@@ -1662,7 +1662,7 @@
                 </a:solidFill>
               </a:rPr>
               <a:pPr/>
-              <a:t>2025-10-01</a:t>
+              <a:t>2025-10-09</a:t>
             </a:fld>
             <a:endParaRPr lang="ko-KR" altLang="en-US" dirty="0">
               <a:solidFill>
@@ -1959,7 +1959,7 @@
                 </a:solidFill>
               </a:rPr>
               <a:pPr/>
-              <a:t>2025-10-01</a:t>
+              <a:t>2025-10-09</a:t>
             </a:fld>
             <a:endParaRPr lang="ko-KR" altLang="en-US" dirty="0">
               <a:solidFill>
@@ -2403,7 +2403,7 @@
                 </a:solidFill>
               </a:rPr>
               <a:pPr/>
-              <a:t>2025-10-01</a:t>
+              <a:t>2025-10-09</a:t>
             </a:fld>
             <a:endParaRPr lang="ko-KR" altLang="en-US" dirty="0">
               <a:solidFill>
@@ -2576,7 +2576,7 @@
                 </a:solidFill>
               </a:rPr>
               <a:pPr/>
-              <a:t>2025-10-01</a:t>
+              <a:t>2025-10-09</a:t>
             </a:fld>
             <a:endParaRPr lang="ko-KR" altLang="en-US" dirty="0">
               <a:solidFill>
@@ -2721,7 +2721,7 @@
                 </a:solidFill>
               </a:rPr>
               <a:pPr/>
-              <a:t>2025-10-01</a:t>
+              <a:t>2025-10-09</a:t>
             </a:fld>
             <a:endParaRPr lang="ko-KR" altLang="en-US" dirty="0">
               <a:solidFill>
@@ -3064,7 +3064,7 @@
                 </a:solidFill>
               </a:rPr>
               <a:pPr/>
-              <a:t>2025-10-01</a:t>
+              <a:t>2025-10-09</a:t>
             </a:fld>
             <a:endParaRPr lang="ko-KR" altLang="en-US" dirty="0">
               <a:solidFill>
@@ -3384,7 +3384,7 @@
                 </a:solidFill>
               </a:rPr>
               <a:pPr/>
-              <a:t>2025-10-01</a:t>
+              <a:t>2025-10-09</a:t>
             </a:fld>
             <a:endParaRPr lang="ko-KR" altLang="en-US" dirty="0">
               <a:solidFill>
@@ -3657,7 +3657,7 @@
                 </a:solidFill>
               </a:rPr>
               <a:pPr/>
-              <a:t>2025-10-01</a:t>
+              <a:t>2025-10-09</a:t>
             </a:fld>
             <a:endParaRPr lang="ko-KR" altLang="en-US" dirty="0">
               <a:solidFill>
@@ -6783,8 +6783,8 @@
         </p:nvSpPr>
         <p:spPr>
           <a:xfrm>
-            <a:off x="4028536" y="3265127"/>
-            <a:ext cx="7090913" cy="4247317"/>
+            <a:off x="4023772" y="2902783"/>
+            <a:ext cx="7090913" cy="4801314"/>
           </a:xfrm>
           <a:prstGeom prst="rect">
             <a:avLst/>
@@ -6837,9 +6837,22 @@
               <a:rPr lang="en-US" altLang="ko-KR" dirty="0"/>
               <a:t>.</a:t>
             </a:r>
+          </a:p>
+          <a:p>
+            <a:endParaRPr lang="en-US" altLang="ko-KR" dirty="0"/>
+          </a:p>
+          <a:p>
             <a:r>
               <a:rPr lang="ko-KR" altLang="en-US" dirty="0"/>
-              <a:t>  </a:t>
+              <a:t>직업 </a:t>
+            </a:r>
+            <a:r>
+              <a:rPr lang="en-US" altLang="ko-KR" dirty="0"/>
+              <a:t>: </a:t>
+            </a:r>
+            <a:r>
+              <a:rPr lang="ko-KR" altLang="en-US"/>
+              <a:t>고고학 전공 교수  </a:t>
             </a:r>
             <a:endParaRPr lang="en-US" altLang="ko-KR" dirty="0"/>
           </a:p>
